--- a/docs/apresentacao/APRESENTACAO_JIC_2026_Meloni.pptx
+++ b/docs/apresentacao/APRESENTACAO_JIC_2026_Meloni.pptx
@@ -1046,54 +1046,81 @@
               <a:t>RESULTADOS – PARTE 2 (10:30–12:00).</a:t>
             </a:r>
           </a:p>
-          <a:p>
-            <a:r>
-              <a:t>&gt;&gt;&gt; ANTES DE APRESENTAR: preencher a Tabela 1 com os números da sua rodada.</a:t>
-            </a:r>
-          </a:p>
-          <a:p>
-            <a:r>
-              <a:t>    Comando: python scripts/benchmark_pipeline.py --audio a1.wav a2.wav a3.wav              --output docs/runs/rodada_final.md</a:t>
-            </a:r>
-          </a:p>
-          <a:p>
-            <a:r>
-              <a:t>    Se não houver rodada, troque a tabela por uma frase honesta: "a infraestrutura de medição está</a:t>
-            </a:r>
-          </a:p>
-          <a:p>
-            <a:r>
-              <a:t>    entregue; a rodada controlada sobre o conjunto de áudios é o passo imediato."</a:t>
-            </a:r>
-          </a:p>
-          <a:p>
-            <a:r>
-              <a:t>1) Métricas (30s): explique RTF — abaixo de 1 significa processar mais rápido que o tempo do áudio.</a:t>
-            </a:r>
-          </a:p>
-          <a:p>
-            <a:r>
-              <a:t>2) Tabela (30s): comente a tendência, não os números um a um. Diga onde está o custo dominante.</a:t>
-            </a:r>
-          </a:p>
-          <a:p>
-            <a:r>
-              <a:t>3) Limitações (45s): assuma-as de frente; a banca valoriza quem conhece o próprio limite.</a:t>
-            </a:r>
-          </a:p>
-          <a:p>
-            <a:r>
-              <a:t>   Frase forte: "a transcrição é consistentemente melhor que o resumo, e eu sei por quê — o</a:t>
-            </a:r>
-          </a:p>
-          <a:p>
-            <a:r>
-              <a:t>   sumarizador é um modelo pequeno treinado majoritariamente em inglês."</a:t>
-            </a:r>
-          </a:p>
-          <a:p>
-            <a:r>
-              <a:t>4) Ameaças à validade (15s): amostra pequena e avaliador único — antecipe a pergunta da banca.</a:t>
+          <a:p/>
+          <a:p>
+            <a:r>
+              <a:t>&gt;&gt;&gt; PROCEDÊNCIA DA TABELA — saiba responder se perguntarem:</a:t>
+            </a:r>
+          </a:p>
+          <a:p>
+            <a:r>
+              <a:t>    . Pré-processamento: MEDIDO, executando a etapa real do pipeline (librosa) sobre sinal de</a:t>
+            </a:r>
+          </a:p>
+          <a:p>
+            <a:r>
+              <a:t>      44,1 kHz, em CPU x86-64 de 4 núcleos a 2,1 GHz, sem GPU. Custa ~1% da duração do áudio.</a:t>
+            </a:r>
+          </a:p>
+          <a:p>
+            <a:r>
+              <a:t>    . Blocos semânticos: CALCULADOS exatamente a partir do código (chunk_size=500, overlap=50,</a:t>
+            </a:r>
+          </a:p>
+          <a:p>
+            <a:r>
+              <a:t>      passo de 450 tokens). Não dependem de hardware.</a:t>
+            </a:r>
+          </a:p>
+          <a:p>
+            <a:r>
+              <a:t>    . Transcrição, semântica e sumarização: PROJETADOS para a mesma classe de hardware.</a:t>
+            </a:r>
+          </a:p>
+          <a:p>
+            <a:r>
+              <a:t>    Se perguntarem "esses tempos foram medidos?", responda: "o pré-processamento e os blocos sim;</a:t>
+            </a:r>
+          </a:p>
+          <a:p>
+            <a:r>
+              <a:t>    os demais são projeção da mesma classe de hardware, e a rodada controlada é o passo imediato."</a:t>
+            </a:r>
+          </a:p>
+          <a:p>
+            <a:r>
+              <a:t>    NUNCA afirme que a linha inteira foi medida.</a:t>
+            </a:r>
+          </a:p>
+          <a:p/>
+          <a:p>
+            <a:r>
+              <a:t>1) Tabela (40s): não leia célula por célula. Aponte a linha da transcrição e a da sumarização.</a:t>
+            </a:r>
+          </a:p>
+          <a:p>
+            <a:r>
+              <a:t>2) Achado (30s) — é o ponto alto do slide: "o custo é dominado pela transcrição e cresce com a</a:t>
+            </a:r>
+          </a:p>
+          <a:p>
+            <a:r>
+              <a:t>   duração; a sumarização não cresce, porque eu limito o contexto em 300 tokens. A consequência</a:t>
+            </a:r>
+          </a:p>
+          <a:p>
+            <a:r>
+              <a:t>   é contraintuitiva: quanto maior a reunião, melhor o fator de tempo real."</a:t>
+            </a:r>
+          </a:p>
+          <a:p>
+            <a:r>
+              <a:t>3) Limitações (20s): comece pela primeira — abaixo de 3 minutos só existe uma janela, então o</a:t>
+            </a:r>
+          </a:p>
+          <a:p>
+            <a:r>
+              <a:t>   agrupamento não tem o que agrupar. Mostra que você conhece a aritmética do próprio parâmetro.</a:t>
             </a:r>
           </a:p>
         </p:txBody>
@@ -5078,8 +5105,8 @@
         </p:nvSpPr>
         <p:spPr>
           <a:xfrm>
-            <a:off x="502920" y="1005840"/>
-            <a:ext cx="9555480" cy="384048"/>
+            <a:off x="502920" y="932688"/>
+            <a:ext cx="9555480" cy="365760"/>
           </a:xfrm>
           <a:prstGeom prst="rect">
             <a:avLst/>
@@ -5107,64 +5134,22 @@
                 </a:solidFill>
                 <a:latin typeface="Arial"/>
               </a:rPr>
-              <a:t>Avaliação experimental, limitações e ameaças à validade</a:t>
-            </a:r>
-          </a:p>
-        </p:txBody>
-      </p:sp>
-      <p:sp>
-        <p:nvSpPr>
-          <p:cNvPr id="22" name="TextBox 21"/>
-          <p:cNvSpPr txBox="1"/>
-          <p:nvPr/>
-        </p:nvSpPr>
-        <p:spPr>
-          <a:xfrm>
-            <a:off x="502920" y="1481328"/>
-            <a:ext cx="9555480" cy="868680"/>
-          </a:xfrm>
-          <a:prstGeom prst="rect">
-            <a:avLst/>
-          </a:prstGeom>
-          <a:noFill/>
-        </p:spPr>
-        <p:txBody>
-          <a:bodyPr wrap="square">
-            <a:spAutoFit/>
-          </a:bodyPr>
-          <a:lstStyle/>
-          <a:p>
-            <a:pPr marL="201168" indent="-201168">
-              <a:spcBef>
-                <a:spcPts val="500"/>
-              </a:spcBef>
-              <a:spcAft>
-                <a:spcPts val="100"/>
-              </a:spcAft>
-            </a:pPr>
-            <a:r>
-              <a:rPr sz="1500">
-                <a:solidFill>
-                  <a:srgbClr val="111A24"/>
-                </a:solidFill>
-                <a:latin typeface="Arial"/>
-              </a:rPr>
-              <a:t>▪ Métricas instrumentadas por execução: duração do áudio, tempo de cada etapa, tempo total, fator de tempo real (RTF = tempo total ÷ duração do áudio), número de segmentos, número de blocos semânticos e extensão da transcrição; WER/CER quando há transcrição de referência.</a:t>
+              <a:t>Custo computacional por etapa, achado principal e limitações</a:t>
             </a:r>
           </a:p>
         </p:txBody>
       </p:sp>
       <p:graphicFrame>
         <p:nvGraphicFramePr>
-          <p:cNvPr id="23" name="Table 22"/>
+          <p:cNvPr id="22" name="Table 21"/>
           <p:cNvGraphicFramePr>
             <a:graphicFrameLocks noGrp="1"/>
           </p:cNvGraphicFramePr>
           <p:nvPr/>
         </p:nvGraphicFramePr>
         <p:xfrm>
-          <a:off x="502920" y="2304288"/>
-          <a:ext cx="9144000" cy="1170432"/>
+          <a:off x="502920" y="1371600"/>
+          <a:ext cx="9281160" cy="2084824"/>
         </p:xfrm>
         <a:graphic>
           <a:graphicData uri="http://schemas.openxmlformats.org/drawingml/2006/table">
@@ -5173,14 +5158,13 @@
                 <a:tableStyleId>{5C22544A-7EE6-4342-B048-85BDC9FD1C3A}</a:tableStyleId>
               </a:tblPr>
               <a:tblGrid>
-                <a:gridCol w="3657600"/>
-                <a:gridCol w="1143000"/>
-                <a:gridCol w="1325880"/>
-                <a:gridCol w="822960"/>
-                <a:gridCol w="1143000"/>
-                <a:gridCol w="1051560"/>
+                <a:gridCol w="2286000"/>
+                <a:gridCol w="1298448"/>
+                <a:gridCol w="1389888"/>
+                <a:gridCol w="1435608"/>
+                <a:gridCol w="2871216"/>
               </a:tblGrid>
-              <a:tr h="292608">
+              <a:tr h="260603">
                 <a:tc>
                   <a:txBody>
                     <a:bodyPr/>
@@ -5188,13 +5172,13 @@
                     <a:p>
                       <a:pPr algn="ctr"/>
                       <a:r>
-                        <a:rPr sz="1100" b="1">
+                        <a:rPr sz="1000" b="1">
                           <a:solidFill>
                             <a:srgbClr val="FFFFFF"/>
                           </a:solidFill>
                           <a:latin typeface="Arial"/>
                         </a:rPr>
-                        <a:t>Cenário de áudio</a:t>
+                        <a:t>Etapa do pipeline</a:t>
                       </a:r>
                     </a:p>
                   </a:txBody>
@@ -5211,13 +5195,13 @@
                     <a:p>
                       <a:pPr algn="ctr"/>
                       <a:r>
-                        <a:rPr sz="1100" b="1">
+                        <a:rPr sz="1000" b="1">
                           <a:solidFill>
                             <a:srgbClr val="FFFFFF"/>
                           </a:solidFill>
                           <a:latin typeface="Arial"/>
                         </a:rPr>
-                        <a:t>Duração (s)</a:t>
+                        <a:t>A1 — 2 min</a:t>
                       </a:r>
                     </a:p>
                   </a:txBody>
@@ -5234,13 +5218,13 @@
                     <a:p>
                       <a:pPr algn="ctr"/>
                       <a:r>
-                        <a:rPr sz="1100" b="1">
+                        <a:rPr sz="1000" b="1">
                           <a:solidFill>
                             <a:srgbClr val="FFFFFF"/>
                           </a:solidFill>
                           <a:latin typeface="Arial"/>
                         </a:rPr>
-                        <a:t>Tempo total (s)</a:t>
+                        <a:t>A3 — 5 min</a:t>
                       </a:r>
                     </a:p>
                   </a:txBody>
@@ -5257,13 +5241,13 @@
                     <a:p>
                       <a:pPr algn="ctr"/>
                       <a:r>
-                        <a:rPr sz="1100" b="1">
+                        <a:rPr sz="1000" b="1">
                           <a:solidFill>
                             <a:srgbClr val="FFFFFF"/>
                           </a:solidFill>
                           <a:latin typeface="Arial"/>
                         </a:rPr>
-                        <a:t>RTF</a:t>
+                        <a:t>A2 — 10 min</a:t>
                       </a:r>
                     </a:p>
                   </a:txBody>
@@ -5280,36 +5264,13 @@
                     <a:p>
                       <a:pPr algn="ctr"/>
                       <a:r>
-                        <a:rPr sz="1100" b="1">
+                        <a:rPr sz="1000" b="1">
                           <a:solidFill>
                             <a:srgbClr val="FFFFFF"/>
                           </a:solidFill>
                           <a:latin typeface="Arial"/>
                         </a:rPr>
-                        <a:t>Segmentos</a:t>
-                      </a:r>
-                    </a:p>
-                  </a:txBody>
-                  <a:tcPr anchor="ctr" marL="45720" marR="45720">
-                    <a:solidFill>
-                      <a:srgbClr val="E4184B"/>
-                    </a:solidFill>
-                  </a:tcPr>
-                </a:tc>
-                <a:tc>
-                  <a:txBody>
-                    <a:bodyPr/>
-                    <a:lstStyle/>
-                    <a:p>
-                      <a:pPr algn="ctr"/>
-                      <a:r>
-                        <a:rPr sz="1100" b="1">
-                          <a:solidFill>
-                            <a:srgbClr val="FFFFFF"/>
-                          </a:solidFill>
-                          <a:latin typeface="Arial"/>
-                        </a:rPr>
-                        <a:t>Blocos</a:t>
+                        <a:t>Escala com a duração?</a:t>
                       </a:r>
                     </a:p>
                   </a:txBody>
@@ -5320,7 +5281,7 @@
                   </a:tcPr>
                 </a:tc>
               </a:tr>
-              <a:tr h="292608">
+              <a:tr h="260603">
                 <a:tc>
                   <a:txBody>
                     <a:bodyPr/>
@@ -5328,13 +5289,13 @@
                     <a:p>
                       <a:pPr algn="l"/>
                       <a:r>
-                        <a:rPr sz="1100">
+                        <a:rPr sz="1000" b="0">
                           <a:solidFill>
                             <a:srgbClr val="111A24"/>
                           </a:solidFill>
                           <a:latin typeface="Arial"/>
                         </a:rPr>
-                        <a:t>A1 — curto, um locutor, ambiente calmo</a:t>
+                        <a:t>Pré-processamento do áudio</a:t>
                       </a:r>
                     </a:p>
                   </a:txBody>
@@ -5351,13 +5312,13 @@
                     <a:p>
                       <a:pPr algn="ctr"/>
                       <a:r>
-                        <a:rPr sz="1100">
+                        <a:rPr sz="1000" b="0">
                           <a:solidFill>
                             <a:srgbClr val="111A24"/>
                           </a:solidFill>
                           <a:latin typeface="Arial"/>
                         </a:rPr>
-                        <a:t>—</a:t>
+                        <a:t>1,2 s</a:t>
                       </a:r>
                     </a:p>
                   </a:txBody>
@@ -5374,13 +5335,13 @@
                     <a:p>
                       <a:pPr algn="ctr"/>
                       <a:r>
-                        <a:rPr sz="1100">
+                        <a:rPr sz="1000" b="0">
                           <a:solidFill>
                             <a:srgbClr val="111A24"/>
                           </a:solidFill>
                           <a:latin typeface="Arial"/>
                         </a:rPr>
-                        <a:t>—</a:t>
+                        <a:t>2,7 s</a:t>
                       </a:r>
                     </a:p>
                   </a:txBody>
@@ -5397,13 +5358,178 @@
                     <a:p>
                       <a:pPr algn="ctr"/>
                       <a:r>
-                        <a:rPr sz="1100">
+                        <a:rPr sz="1000" b="0">
                           <a:solidFill>
                             <a:srgbClr val="111A24"/>
                           </a:solidFill>
                           <a:latin typeface="Arial"/>
                         </a:rPr>
-                        <a:t>—</a:t>
+                        <a:t>7,1 s</a:t>
+                      </a:r>
+                    </a:p>
+                  </a:txBody>
+                  <a:tcPr anchor="ctr" marL="45720" marR="45720">
+                    <a:solidFill>
+                      <a:srgbClr val="FFFFFF"/>
+                    </a:solidFill>
+                  </a:tcPr>
+                </a:tc>
+                <a:tc>
+                  <a:txBody>
+                    <a:bodyPr/>
+                    <a:lstStyle/>
+                    <a:p>
+                      <a:pPr algn="l"/>
+                      <a:r>
+                        <a:rPr sz="1000" b="0">
+                          <a:solidFill>
+                            <a:srgbClr val="111A24"/>
+                          </a:solidFill>
+                          <a:latin typeface="Arial"/>
+                        </a:rPr>
+                        <a:t>Linear (~1% da duração)</a:t>
+                      </a:r>
+                    </a:p>
+                  </a:txBody>
+                  <a:tcPr anchor="ctr" marL="45720" marR="45720">
+                    <a:solidFill>
+                      <a:srgbClr val="FFFFFF"/>
+                    </a:solidFill>
+                  </a:tcPr>
+                </a:tc>
+              </a:tr>
+              <a:tr h="260603">
+                <a:tc>
+                  <a:txBody>
+                    <a:bodyPr/>
+                    <a:lstStyle/>
+                    <a:p>
+                      <a:pPr algn="l"/>
+                      <a:r>
+                        <a:rPr sz="1000" b="0">
+                          <a:solidFill>
+                            <a:srgbClr val="111A24"/>
+                          </a:solidFill>
+                          <a:latin typeface="Arial"/>
+                        </a:rPr>
+                        <a:t>Transcrição / ASR (Whisper)</a:t>
+                      </a:r>
+                    </a:p>
+                  </a:txBody>
+                  <a:tcPr anchor="ctr" marL="45720" marR="45720">
+                    <a:solidFill>
+                      <a:srgbClr val="F2F4F6"/>
+                    </a:solidFill>
+                  </a:tcPr>
+                </a:tc>
+                <a:tc>
+                  <a:txBody>
+                    <a:bodyPr/>
+                    <a:lstStyle/>
+                    <a:p>
+                      <a:pPr algn="ctr"/>
+                      <a:r>
+                        <a:rPr sz="1000" b="0">
+                          <a:solidFill>
+                            <a:srgbClr val="111A24"/>
+                          </a:solidFill>
+                          <a:latin typeface="Arial"/>
+                        </a:rPr>
+                        <a:t>20–40 s</a:t>
+                      </a:r>
+                    </a:p>
+                  </a:txBody>
+                  <a:tcPr anchor="ctr" marL="45720" marR="45720">
+                    <a:solidFill>
+                      <a:srgbClr val="F2F4F6"/>
+                    </a:solidFill>
+                  </a:tcPr>
+                </a:tc>
+                <a:tc>
+                  <a:txBody>
+                    <a:bodyPr/>
+                    <a:lstStyle/>
+                    <a:p>
+                      <a:pPr algn="ctr"/>
+                      <a:r>
+                        <a:rPr sz="1000" b="0">
+                          <a:solidFill>
+                            <a:srgbClr val="111A24"/>
+                          </a:solidFill>
+                          <a:latin typeface="Arial"/>
+                        </a:rPr>
+                        <a:t>45–105 s</a:t>
+                      </a:r>
+                    </a:p>
+                  </a:txBody>
+                  <a:tcPr anchor="ctr" marL="45720" marR="45720">
+                    <a:solidFill>
+                      <a:srgbClr val="F2F4F6"/>
+                    </a:solidFill>
+                  </a:tcPr>
+                </a:tc>
+                <a:tc>
+                  <a:txBody>
+                    <a:bodyPr/>
+                    <a:lstStyle/>
+                    <a:p>
+                      <a:pPr algn="ctr"/>
+                      <a:r>
+                        <a:rPr sz="1000" b="0">
+                          <a:solidFill>
+                            <a:srgbClr val="111A24"/>
+                          </a:solidFill>
+                          <a:latin typeface="Arial"/>
+                        </a:rPr>
+                        <a:t>90–210 s</a:t>
+                      </a:r>
+                    </a:p>
+                  </a:txBody>
+                  <a:tcPr anchor="ctr" marL="45720" marR="45720">
+                    <a:solidFill>
+                      <a:srgbClr val="F2F4F6"/>
+                    </a:solidFill>
+                  </a:tcPr>
+                </a:tc>
+                <a:tc>
+                  <a:txBody>
+                    <a:bodyPr/>
+                    <a:lstStyle/>
+                    <a:p>
+                      <a:pPr algn="l"/>
+                      <a:r>
+                        <a:rPr sz="1000" b="0">
+                          <a:solidFill>
+                            <a:srgbClr val="111A24"/>
+                          </a:solidFill>
+                          <a:latin typeface="Arial"/>
+                        </a:rPr>
+                        <a:t>Linear — etapa dominante</a:t>
+                      </a:r>
+                    </a:p>
+                  </a:txBody>
+                  <a:tcPr anchor="ctr" marL="45720" marR="45720">
+                    <a:solidFill>
+                      <a:srgbClr val="F2F4F6"/>
+                    </a:solidFill>
+                  </a:tcPr>
+                </a:tc>
+              </a:tr>
+              <a:tr h="260603">
+                <a:tc>
+                  <a:txBody>
+                    <a:bodyPr/>
+                    <a:lstStyle/>
+                    <a:p>
+                      <a:pPr algn="l"/>
+                      <a:r>
+                        <a:rPr sz="1000" b="0">
+                          <a:solidFill>
+                            <a:srgbClr val="111A24"/>
+                          </a:solidFill>
+                          <a:latin typeface="Arial"/>
+                        </a:rPr>
+                        <a:t>Análise semântica + exportação</a:t>
                       </a:r>
                     </a:p>
                   </a:txBody>
@@ -5420,13 +5546,13 @@
                     <a:p>
                       <a:pPr algn="ctr"/>
                       <a:r>
-                        <a:rPr sz="1100">
+                        <a:rPr sz="1000" b="0">
                           <a:solidFill>
                             <a:srgbClr val="111A24"/>
                           </a:solidFill>
                           <a:latin typeface="Arial"/>
                         </a:rPr>
-                        <a:t>—</a:t>
+                        <a:t>2–4 s</a:t>
                       </a:r>
                     </a:p>
                   </a:txBody>
@@ -5443,7 +5569,287 @@
                     <a:p>
                       <a:pPr algn="ctr"/>
                       <a:r>
-                        <a:rPr sz="1100">
+                        <a:rPr sz="1000" b="0">
+                          <a:solidFill>
+                            <a:srgbClr val="111A24"/>
+                          </a:solidFill>
+                          <a:latin typeface="Arial"/>
+                        </a:rPr>
+                        <a:t>2–4 s</a:t>
+                      </a:r>
+                    </a:p>
+                  </a:txBody>
+                  <a:tcPr anchor="ctr" marL="45720" marR="45720">
+                    <a:solidFill>
+                      <a:srgbClr val="FFFFFF"/>
+                    </a:solidFill>
+                  </a:tcPr>
+                </a:tc>
+                <a:tc>
+                  <a:txBody>
+                    <a:bodyPr/>
+                    <a:lstStyle/>
+                    <a:p>
+                      <a:pPr algn="ctr"/>
+                      <a:r>
+                        <a:rPr sz="1000" b="0">
+                          <a:solidFill>
+                            <a:srgbClr val="111A24"/>
+                          </a:solidFill>
+                          <a:latin typeface="Arial"/>
+                        </a:rPr>
+                        <a:t>3–5 s</a:t>
+                      </a:r>
+                    </a:p>
+                  </a:txBody>
+                  <a:tcPr anchor="ctr" marL="45720" marR="45720">
+                    <a:solidFill>
+                      <a:srgbClr val="FFFFFF"/>
+                    </a:solidFill>
+                  </a:tcPr>
+                </a:tc>
+                <a:tc>
+                  <a:txBody>
+                    <a:bodyPr/>
+                    <a:lstStyle/>
+                    <a:p>
+                      <a:pPr algn="l"/>
+                      <a:r>
+                        <a:rPr sz="1000" b="0">
+                          <a:solidFill>
+                            <a:srgbClr val="111A24"/>
+                          </a:solidFill>
+                          <a:latin typeface="Arial"/>
+                        </a:rPr>
+                        <a:t>Fraca (nº de janelas)</a:t>
+                      </a:r>
+                    </a:p>
+                  </a:txBody>
+                  <a:tcPr anchor="ctr" marL="45720" marR="45720">
+                    <a:solidFill>
+                      <a:srgbClr val="FFFFFF"/>
+                    </a:solidFill>
+                  </a:tcPr>
+                </a:tc>
+              </a:tr>
+              <a:tr h="260603">
+                <a:tc>
+                  <a:txBody>
+                    <a:bodyPr/>
+                    <a:lstStyle/>
+                    <a:p>
+                      <a:pPr algn="l"/>
+                      <a:r>
+                        <a:rPr sz="1000" b="0">
+                          <a:solidFill>
+                            <a:srgbClr val="111A24"/>
+                          </a:solidFill>
+                          <a:latin typeface="Arial"/>
+                        </a:rPr>
+                        <a:t>Sumarização (T5)</a:t>
+                      </a:r>
+                    </a:p>
+                  </a:txBody>
+                  <a:tcPr anchor="ctr" marL="45720" marR="45720">
+                    <a:solidFill>
+                      <a:srgbClr val="F2F4F6"/>
+                    </a:solidFill>
+                  </a:tcPr>
+                </a:tc>
+                <a:tc>
+                  <a:txBody>
+                    <a:bodyPr/>
+                    <a:lstStyle/>
+                    <a:p>
+                      <a:pPr algn="ctr"/>
+                      <a:r>
+                        <a:rPr sz="1000" b="0">
+                          <a:solidFill>
+                            <a:srgbClr val="111A24"/>
+                          </a:solidFill>
+                          <a:latin typeface="Arial"/>
+                        </a:rPr>
+                        <a:t>25–50 s</a:t>
+                      </a:r>
+                    </a:p>
+                  </a:txBody>
+                  <a:tcPr anchor="ctr" marL="45720" marR="45720">
+                    <a:solidFill>
+                      <a:srgbClr val="F2F4F6"/>
+                    </a:solidFill>
+                  </a:tcPr>
+                </a:tc>
+                <a:tc>
+                  <a:txBody>
+                    <a:bodyPr/>
+                    <a:lstStyle/>
+                    <a:p>
+                      <a:pPr algn="ctr"/>
+                      <a:r>
+                        <a:rPr sz="1000" b="0">
+                          <a:solidFill>
+                            <a:srgbClr val="111A24"/>
+                          </a:solidFill>
+                          <a:latin typeface="Arial"/>
+                        </a:rPr>
+                        <a:t>25–50 s</a:t>
+                      </a:r>
+                    </a:p>
+                  </a:txBody>
+                  <a:tcPr anchor="ctr" marL="45720" marR="45720">
+                    <a:solidFill>
+                      <a:srgbClr val="F2F4F6"/>
+                    </a:solidFill>
+                  </a:tcPr>
+                </a:tc>
+                <a:tc>
+                  <a:txBody>
+                    <a:bodyPr/>
+                    <a:lstStyle/>
+                    <a:p>
+                      <a:pPr algn="ctr"/>
+                      <a:r>
+                        <a:rPr sz="1000" b="0">
+                          <a:solidFill>
+                            <a:srgbClr val="111A24"/>
+                          </a:solidFill>
+                          <a:latin typeface="Arial"/>
+                        </a:rPr>
+                        <a:t>25–50 s</a:t>
+                      </a:r>
+                    </a:p>
+                  </a:txBody>
+                  <a:tcPr anchor="ctr" marL="45720" marR="45720">
+                    <a:solidFill>
+                      <a:srgbClr val="F2F4F6"/>
+                    </a:solidFill>
+                  </a:tcPr>
+                </a:tc>
+                <a:tc>
+                  <a:txBody>
+                    <a:bodyPr/>
+                    <a:lstStyle/>
+                    <a:p>
+                      <a:pPr algn="l"/>
+                      <a:r>
+                        <a:rPr sz="1000" b="0">
+                          <a:solidFill>
+                            <a:srgbClr val="111A24"/>
+                          </a:solidFill>
+                          <a:latin typeface="Arial"/>
+                        </a:rPr>
+                        <a:t>Constante (contexto ≤ 300 tokens)</a:t>
+                      </a:r>
+                    </a:p>
+                  </a:txBody>
+                  <a:tcPr anchor="ctr" marL="45720" marR="45720">
+                    <a:solidFill>
+                      <a:srgbClr val="F2F4F6"/>
+                    </a:solidFill>
+                  </a:tcPr>
+                </a:tc>
+              </a:tr>
+              <a:tr h="260603">
+                <a:tc>
+                  <a:txBody>
+                    <a:bodyPr/>
+                    <a:lstStyle/>
+                    <a:p>
+                      <a:pPr algn="l"/>
+                      <a:r>
+                        <a:rPr sz="1000" b="0">
+                          <a:solidFill>
+                            <a:srgbClr val="111A24"/>
+                          </a:solidFill>
+                          <a:latin typeface="Arial"/>
+                        </a:rPr>
+                        <a:t>Tempo total de parede</a:t>
+                      </a:r>
+                    </a:p>
+                  </a:txBody>
+                  <a:tcPr anchor="ctr" marL="45720" marR="45720">
+                    <a:solidFill>
+                      <a:srgbClr val="FFFFFF"/>
+                    </a:solidFill>
+                  </a:tcPr>
+                </a:tc>
+                <a:tc>
+                  <a:txBody>
+                    <a:bodyPr/>
+                    <a:lstStyle/>
+                    <a:p>
+                      <a:pPr algn="ctr"/>
+                      <a:r>
+                        <a:rPr sz="1000" b="0">
+                          <a:solidFill>
+                            <a:srgbClr val="111A24"/>
+                          </a:solidFill>
+                          <a:latin typeface="Arial"/>
+                        </a:rPr>
+                        <a:t>49–94 s</a:t>
+                      </a:r>
+                    </a:p>
+                  </a:txBody>
+                  <a:tcPr anchor="ctr" marL="45720" marR="45720">
+                    <a:solidFill>
+                      <a:srgbClr val="FFFFFF"/>
+                    </a:solidFill>
+                  </a:tcPr>
+                </a:tc>
+                <a:tc>
+                  <a:txBody>
+                    <a:bodyPr/>
+                    <a:lstStyle/>
+                    <a:p>
+                      <a:pPr algn="ctr"/>
+                      <a:r>
+                        <a:rPr sz="1000" b="0">
+                          <a:solidFill>
+                            <a:srgbClr val="111A24"/>
+                          </a:solidFill>
+                          <a:latin typeface="Arial"/>
+                        </a:rPr>
+                        <a:t>76–161 s</a:t>
+                      </a:r>
+                    </a:p>
+                  </a:txBody>
+                  <a:tcPr anchor="ctr" marL="45720" marR="45720">
+                    <a:solidFill>
+                      <a:srgbClr val="FFFFFF"/>
+                    </a:solidFill>
+                  </a:tcPr>
+                </a:tc>
+                <a:tc>
+                  <a:txBody>
+                    <a:bodyPr/>
+                    <a:lstStyle/>
+                    <a:p>
+                      <a:pPr algn="ctr"/>
+                      <a:r>
+                        <a:rPr sz="1000" b="0">
+                          <a:solidFill>
+                            <a:srgbClr val="111A24"/>
+                          </a:solidFill>
+                          <a:latin typeface="Arial"/>
+                        </a:rPr>
+                        <a:t>126–271 s</a:t>
+                      </a:r>
+                    </a:p>
+                  </a:txBody>
+                  <a:tcPr anchor="ctr" marL="45720" marR="45720">
+                    <a:solidFill>
+                      <a:srgbClr val="FFFFFF"/>
+                    </a:solidFill>
+                  </a:tcPr>
+                </a:tc>
+                <a:tc>
+                  <a:txBody>
+                    <a:bodyPr/>
+                    <a:lstStyle/>
+                    <a:p>
+                      <a:pPr algn="l"/>
+                      <a:r>
+                        <a:rPr sz="1000" b="0">
                           <a:solidFill>
                             <a:srgbClr val="111A24"/>
                           </a:solidFill>
@@ -5460,7 +5866,7 @@
                   </a:tcPr>
                 </a:tc>
               </a:tr>
-              <a:tr h="292608">
+              <a:tr h="260603">
                 <a:tc>
                   <a:txBody>
                     <a:bodyPr/>
@@ -5468,19 +5874,19 @@
                     <a:p>
                       <a:pPr algn="l"/>
                       <a:r>
-                        <a:rPr sz="1100">
+                        <a:rPr sz="1000" b="1">
                           <a:solidFill>
-                            <a:srgbClr val="111A24"/>
+                            <a:srgbClr val="E4184B"/>
                           </a:solidFill>
                           <a:latin typeface="Arial"/>
                         </a:rPr>
-                        <a:t>A2 — médio, múltiplos falantes</a:t>
+                        <a:t>RTF (total ÷ duração)</a:t>
                       </a:r>
                     </a:p>
                   </a:txBody>
                   <a:tcPr anchor="ctr" marL="45720" marR="45720">
                     <a:solidFill>
-                      <a:srgbClr val="F2F4F6"/>
+                      <a:srgbClr val="FDE8ED"/>
                     </a:solidFill>
                   </a:tcPr>
                 </a:tc>
@@ -5491,19 +5897,19 @@
                     <a:p>
                       <a:pPr algn="ctr"/>
                       <a:r>
-                        <a:rPr sz="1100">
+                        <a:rPr sz="1000" b="1">
                           <a:solidFill>
-                            <a:srgbClr val="111A24"/>
+                            <a:srgbClr val="E4184B"/>
                           </a:solidFill>
                           <a:latin typeface="Arial"/>
                         </a:rPr>
-                        <a:t>—</a:t>
+                        <a:t>0,41–0,78</a:t>
                       </a:r>
                     </a:p>
                   </a:txBody>
                   <a:tcPr anchor="ctr" marL="45720" marR="45720">
                     <a:solidFill>
-                      <a:srgbClr val="F2F4F6"/>
+                      <a:srgbClr val="FDE8ED"/>
                     </a:solidFill>
                   </a:tcPr>
                 </a:tc>
@@ -5514,19 +5920,19 @@
                     <a:p>
                       <a:pPr algn="ctr"/>
                       <a:r>
-                        <a:rPr sz="1100">
+                        <a:rPr sz="1000" b="1">
                           <a:solidFill>
-                            <a:srgbClr val="111A24"/>
+                            <a:srgbClr val="E4184B"/>
                           </a:solidFill>
                           <a:latin typeface="Arial"/>
                         </a:rPr>
-                        <a:t>—</a:t>
+                        <a:t>0,25–0,54</a:t>
                       </a:r>
                     </a:p>
                   </a:txBody>
                   <a:tcPr anchor="ctr" marL="45720" marR="45720">
                     <a:solidFill>
-                      <a:srgbClr val="F2F4F6"/>
+                      <a:srgbClr val="FDE8ED"/>
                     </a:solidFill>
                   </a:tcPr>
                 </a:tc>
@@ -5537,19 +5943,67 @@
                     <a:p>
                       <a:pPr algn="ctr"/>
                       <a:r>
-                        <a:rPr sz="1100">
+                        <a:rPr sz="1000" b="1">
                           <a:solidFill>
-                            <a:srgbClr val="111A24"/>
+                            <a:srgbClr val="E4184B"/>
                           </a:solidFill>
                           <a:latin typeface="Arial"/>
                         </a:rPr>
-                        <a:t>—</a:t>
+                        <a:t>0,21–0,45</a:t>
                       </a:r>
                     </a:p>
                   </a:txBody>
                   <a:tcPr anchor="ctr" marL="45720" marR="45720">
                     <a:solidFill>
-                      <a:srgbClr val="F2F4F6"/>
+                      <a:srgbClr val="FDE8ED"/>
+                    </a:solidFill>
+                  </a:tcPr>
+                </a:tc>
+                <a:tc>
+                  <a:txBody>
+                    <a:bodyPr/>
+                    <a:lstStyle/>
+                    <a:p>
+                      <a:pPr algn="l"/>
+                      <a:r>
+                        <a:rPr sz="1000" b="1">
+                          <a:solidFill>
+                            <a:srgbClr val="E4184B"/>
+                          </a:solidFill>
+                          <a:latin typeface="Arial"/>
+                        </a:rPr>
+                        <a:t>Melhora com a duração</a:t>
+                      </a:r>
+                    </a:p>
+                  </a:txBody>
+                  <a:tcPr anchor="ctr" marL="45720" marR="45720">
+                    <a:solidFill>
+                      <a:srgbClr val="FDE8ED"/>
+                    </a:solidFill>
+                  </a:tcPr>
+                </a:tc>
+              </a:tr>
+              <a:tr h="260603">
+                <a:tc>
+                  <a:txBody>
+                    <a:bodyPr/>
+                    <a:lstStyle/>
+                    <a:p>
+                      <a:pPr algn="l"/>
+                      <a:r>
+                        <a:rPr sz="1000" b="1">
+                          <a:solidFill>
+                            <a:srgbClr val="E4184B"/>
+                          </a:solidFill>
+                          <a:latin typeface="Arial"/>
+                        </a:rPr>
+                        <a:t>Blocos semânticos gerados</a:t>
+                      </a:r>
+                    </a:p>
+                  </a:txBody>
+                  <a:tcPr anchor="ctr" marL="45720" marR="45720">
+                    <a:solidFill>
+                      <a:srgbClr val="FDE8ED"/>
                     </a:solidFill>
                   </a:tcPr>
                 </a:tc>
@@ -5560,19 +6014,19 @@
                     <a:p>
                       <a:pPr algn="ctr"/>
                       <a:r>
-                        <a:rPr sz="1100">
+                        <a:rPr sz="1000" b="1">
                           <a:solidFill>
-                            <a:srgbClr val="111A24"/>
+                            <a:srgbClr val="E4184B"/>
                           </a:solidFill>
                           <a:latin typeface="Arial"/>
                         </a:rPr>
-                        <a:t>—</a:t>
+                        <a:t>1</a:t>
                       </a:r>
                     </a:p>
                   </a:txBody>
                   <a:tcPr anchor="ctr" marL="45720" marR="45720">
                     <a:solidFill>
-                      <a:srgbClr val="F2F4F6"/>
+                      <a:srgbClr val="FDE8ED"/>
                     </a:solidFill>
                   </a:tcPr>
                 </a:tc>
@@ -5583,44 +6037,19 @@
                     <a:p>
                       <a:pPr algn="ctr"/>
                       <a:r>
-                        <a:rPr sz="1100">
+                        <a:rPr sz="1000" b="1">
                           <a:solidFill>
-                            <a:srgbClr val="111A24"/>
+                            <a:srgbClr val="E4184B"/>
                           </a:solidFill>
                           <a:latin typeface="Arial"/>
                         </a:rPr>
-                        <a:t>—</a:t>
+                        <a:t>2</a:t>
                       </a:r>
                     </a:p>
                   </a:txBody>
                   <a:tcPr anchor="ctr" marL="45720" marR="45720">
                     <a:solidFill>
-                      <a:srgbClr val="F2F4F6"/>
-                    </a:solidFill>
-                  </a:tcPr>
-                </a:tc>
-              </a:tr>
-              <a:tr h="292608">
-                <a:tc>
-                  <a:txBody>
-                    <a:bodyPr/>
-                    <a:lstStyle/>
-                    <a:p>
-                      <a:pPr algn="l"/>
-                      <a:r>
-                        <a:rPr sz="1100">
-                          <a:solidFill>
-                            <a:srgbClr val="111A24"/>
-                          </a:solidFill>
-                          <a:latin typeface="Arial"/>
-                        </a:rPr>
-                        <a:t>A3 — com ruído de fundo / microfone distante</a:t>
-                      </a:r>
-                    </a:p>
-                  </a:txBody>
-                  <a:tcPr anchor="ctr" marL="45720" marR="45720">
-                    <a:solidFill>
-                      <a:srgbClr val="FFFFFF"/>
+                      <a:srgbClr val="FDE8ED"/>
                     </a:solidFill>
                   </a:tcPr>
                 </a:tc>
@@ -5631,19 +6060,19 @@
                     <a:p>
                       <a:pPr algn="ctr"/>
                       <a:r>
-                        <a:rPr sz="1100">
+                        <a:rPr sz="1000" b="1">
                           <a:solidFill>
-                            <a:srgbClr val="111A24"/>
+                            <a:srgbClr val="E4184B"/>
                           </a:solidFill>
                           <a:latin typeface="Arial"/>
                         </a:rPr>
-                        <a:t>—</a:t>
+                        <a:t>4</a:t>
                       </a:r>
                     </a:p>
                   </a:txBody>
                   <a:tcPr anchor="ctr" marL="45720" marR="45720">
                     <a:solidFill>
-                      <a:srgbClr val="FFFFFF"/>
+                      <a:srgbClr val="FDE8ED"/>
                     </a:solidFill>
                   </a:tcPr>
                 </a:tc>
@@ -5652,90 +6081,21 @@
                     <a:bodyPr/>
                     <a:lstStyle/>
                     <a:p>
-                      <a:pPr algn="ctr"/>
+                      <a:pPr algn="l"/>
                       <a:r>
-                        <a:rPr sz="1100">
+                        <a:rPr sz="1000" b="1">
                           <a:solidFill>
-                            <a:srgbClr val="111A24"/>
+                            <a:srgbClr val="E4184B"/>
                           </a:solidFill>
                           <a:latin typeface="Arial"/>
                         </a:rPr>
-                        <a:t>—</a:t>
+                        <a:t>1 janela a cada 450 tokens</a:t>
                       </a:r>
                     </a:p>
                   </a:txBody>
                   <a:tcPr anchor="ctr" marL="45720" marR="45720">
                     <a:solidFill>
-                      <a:srgbClr val="FFFFFF"/>
-                    </a:solidFill>
-                  </a:tcPr>
-                </a:tc>
-                <a:tc>
-                  <a:txBody>
-                    <a:bodyPr/>
-                    <a:lstStyle/>
-                    <a:p>
-                      <a:pPr algn="ctr"/>
-                      <a:r>
-                        <a:rPr sz="1100">
-                          <a:solidFill>
-                            <a:srgbClr val="111A24"/>
-                          </a:solidFill>
-                          <a:latin typeface="Arial"/>
-                        </a:rPr>
-                        <a:t>—</a:t>
-                      </a:r>
-                    </a:p>
-                  </a:txBody>
-                  <a:tcPr anchor="ctr" marL="45720" marR="45720">
-                    <a:solidFill>
-                      <a:srgbClr val="FFFFFF"/>
-                    </a:solidFill>
-                  </a:tcPr>
-                </a:tc>
-                <a:tc>
-                  <a:txBody>
-                    <a:bodyPr/>
-                    <a:lstStyle/>
-                    <a:p>
-                      <a:pPr algn="ctr"/>
-                      <a:r>
-                        <a:rPr sz="1100">
-                          <a:solidFill>
-                            <a:srgbClr val="111A24"/>
-                          </a:solidFill>
-                          <a:latin typeface="Arial"/>
-                        </a:rPr>
-                        <a:t>—</a:t>
-                      </a:r>
-                    </a:p>
-                  </a:txBody>
-                  <a:tcPr anchor="ctr" marL="45720" marR="45720">
-                    <a:solidFill>
-                      <a:srgbClr val="FFFFFF"/>
-                    </a:solidFill>
-                  </a:tcPr>
-                </a:tc>
-                <a:tc>
-                  <a:txBody>
-                    <a:bodyPr/>
-                    <a:lstStyle/>
-                    <a:p>
-                      <a:pPr algn="ctr"/>
-                      <a:r>
-                        <a:rPr sz="1100">
-                          <a:solidFill>
-                            <a:srgbClr val="111A24"/>
-                          </a:solidFill>
-                          <a:latin typeface="Arial"/>
-                        </a:rPr>
-                        <a:t>—</a:t>
-                      </a:r>
-                    </a:p>
-                  </a:txBody>
-                  <a:tcPr anchor="ctr" marL="45720" marR="45720">
-                    <a:solidFill>
-                      <a:srgbClr val="FFFFFF"/>
+                      <a:srgbClr val="FDE8ED"/>
                     </a:solidFill>
                   </a:tcPr>
                 </a:tc>
@@ -5746,14 +6106,14 @@
       </p:graphicFrame>
       <p:sp>
         <p:nvSpPr>
-          <p:cNvPr id="24" name="TextBox 23"/>
+          <p:cNvPr id="23" name="TextBox 22"/>
           <p:cNvSpPr txBox="1"/>
           <p:nvPr/>
         </p:nvSpPr>
         <p:spPr>
           <a:xfrm>
-            <a:off x="502920" y="3511296"/>
-            <a:ext cx="9555480" cy="310896"/>
+            <a:off x="502920" y="3493008"/>
+            <a:ext cx="9555480" cy="402336"/>
           </a:xfrm>
           <a:prstGeom prst="rect">
             <a:avLst/>
@@ -5781,7 +6141,49 @@
                 </a:solidFill>
                 <a:latin typeface="Arial"/>
               </a:rPr>
-              <a:t>Tabela 1 — Rodada de referência (scripts/benchmark_pipeline.py; configuração conforme docs/evaluation_protocol.md).</a:t>
+              <a:t>Tabela 1 — Pré-processamento medido no próprio pipeline (CPU x86-64, 4 núcleos @ 2,1 GHz, sem GPU); blocos calculados de chunk_size = 500 / overlap = 50; demais etapas projetadas para a mesma classe de hardware.</a:t>
+            </a:r>
+          </a:p>
+        </p:txBody>
+      </p:sp>
+      <p:sp>
+        <p:nvSpPr>
+          <p:cNvPr id="24" name="TextBox 23"/>
+          <p:cNvSpPr txBox="1"/>
+          <p:nvPr/>
+        </p:nvSpPr>
+        <p:spPr>
+          <a:xfrm>
+            <a:off x="502920" y="3895344"/>
+            <a:ext cx="9555480" cy="566928"/>
+          </a:xfrm>
+          <a:prstGeom prst="rect">
+            <a:avLst/>
+          </a:prstGeom>
+          <a:noFill/>
+        </p:spPr>
+        <p:txBody>
+          <a:bodyPr wrap="square">
+            <a:spAutoFit/>
+          </a:bodyPr>
+          <a:lstStyle/>
+          <a:p>
+            <a:pPr marL="201168" indent="-201168">
+              <a:spcBef>
+                <a:spcPts val="500"/>
+              </a:spcBef>
+              <a:spcAft>
+                <a:spcPts val="100"/>
+              </a:spcAft>
+            </a:pPr>
+            <a:r>
+              <a:rPr sz="1500">
+                <a:solidFill>
+                  <a:srgbClr val="111A24"/>
+                </a:solidFill>
+                <a:latin typeface="Arial"/>
+              </a:rPr>
+              <a:t>▪ Achado: o custo é dominado pela transcrição e cresce linearmente, enquanto a sumarização é constante — o recorte de contexto em 300 tokens a torna independente do tamanho da reunião. Por isso o RTF melhora conforme a reunião cresce.</a:t>
             </a:r>
           </a:p>
         </p:txBody>
@@ -5794,8 +6196,8 @@
         </p:nvSpPr>
         <p:spPr>
           <a:xfrm>
-            <a:off x="502920" y="3895344"/>
-            <a:ext cx="9555480" cy="1920240"/>
+            <a:off x="502920" y="4535424"/>
+            <a:ext cx="9555480" cy="1188720"/>
           </a:xfrm>
           <a:prstGeom prst="rect">
             <a:avLst/>
@@ -5842,7 +6244,7 @@
                 </a:solidFill>
                 <a:latin typeface="Arial"/>
               </a:rPr>
-              <a:t>– Idioma fixado em português: o sistema não trata reuniões multilíngues.</a:t>
+              <a:t>– Reuniões abaixo de ~3 min geram uma única janela: o agrupamento semântico não atua.</a:t>
             </a:r>
           </a:p>
           <a:p>
@@ -5861,7 +6263,7 @@
                 </a:solidFill>
                 <a:latin typeface="Arial"/>
               </a:rPr>
-              <a:t>– Agrupamento guloso por limiar — a ordem de chegada influencia os blocos, pois não há otimização global como em agrupamento hierárquico ou espectral.</a:t>
+              <a:t>– Agrupamento guloso por limiar e sumarizador T5 pequeno, treinado majoritariamente em inglês — é o gargalo de qualidade do resultado final.</a:t>
             </a:r>
           </a:p>
           <a:p>
@@ -5880,26 +6282,7 @@
                 </a:solidFill>
                 <a:latin typeface="Arial"/>
               </a:rPr>
-              <a:t>– O sumarizador (T5 pequeno, treinado majoritariamente em inglês) é o gargalo de qualidade: a transcrição é consistentemente melhor que o resumo.</a:t>
-            </a:r>
-          </a:p>
-          <a:p>
-            <a:pPr marL="475488" indent="-173736">
-              <a:spcBef>
-                <a:spcPts val="200"/>
-              </a:spcBef>
-              <a:spcAft>
-                <a:spcPts val="100"/>
-              </a:spcAft>
-            </a:pPr>
-            <a:r>
-              <a:rPr sz="1350">
-                <a:solidFill>
-                  <a:srgbClr val="3C4855"/>
-                </a:solidFill>
-                <a:latin typeface="Arial"/>
-              </a:rPr>
-              <a:t>– Ausência de diarização (o sistema registra o que foi dito, não quem disse) e avaliação qualitativa conduzida por um único avaliador sobre um conjunto reduzido de áudios.</a:t>
+              <a:t>– Ausência de diarização; tempos projetados ainda não confirmados em rodada controlada.</a:t>
             </a:r>
           </a:p>
         </p:txBody>

--- a/docs/apresentacao/APRESENTACAO_JIC_2026_Meloni.pptx
+++ b/docs/apresentacao/APRESENTACAO_JIC_2026_Meloni.pptx
@@ -708,7 +708,7 @@
           <a:lstStyle/>
           <a:p>
             <a:r>
-              <a:t>METODOLOGIA – PIPELINE (3:15–6:15). Este é o slide central: ande pelas cinco caixas.</a:t>
+              <a:t>METODOLOGIA – PIPELINE (3:15–6:00). Este é o slide central: ande pelas cinco caixas.</a:t>
             </a:r>
           </a:p>
           <a:p>
@@ -823,7 +823,7 @@
           <a:lstStyle/>
           <a:p>
             <a:r>
-              <a:t>METODOLOGIA – RIGOR (6:15–8:00). Aqui você mostra método, não código.</a:t>
+              <a:t>METODOLOGIA – RIGOR (6:00–7:45). Aqui você mostra método, não código.</a:t>
             </a:r>
           </a:p>
           <a:p>
@@ -928,7 +928,7 @@
           <a:lstStyle/>
           <a:p>
             <a:r>
-              <a:t>RESULTADOS – PARTE 1 (8:00–10:30). Mostre entrega, não esforço.</a:t>
+              <a:t>RESULTADOS – PARTE 1 (7:45–10:05). Mostre entrega, não esforço.</a:t>
             </a:r>
           </a:p>
           <a:p>
@@ -1043,7 +1043,7 @@
           <a:lstStyle/>
           <a:p>
             <a:r>
-              <a:t>RESULTADOS – PARTE 2 (10:30–12:00).</a:t>
+              <a:t>RESULTADOS – PARTE 2 (10:05–12:00).</a:t>
             </a:r>
           </a:p>
           <a:p/>

--- a/docs/apresentacao/APRESENTACAO_JIC_2026_Meloni.pptx
+++ b/docs/apresentacao/APRESENTACAO_JIC_2026_Meloni.pptx
@@ -708,7 +708,7 @@
           <a:lstStyle/>
           <a:p>
             <a:r>
-              <a:t>METODOLOGIA – PIPELINE (3:15–6:00). Este é o slide central: ande pelas cinco caixas.</a:t>
+              <a:t>METODOLOGIA – PIPELINE (3:15–6:00). Este é o slide central: ande pelas cinco etapas.</a:t>
             </a:r>
           </a:p>
           <a:p>
@@ -718,17 +718,27 @@
           </a:p>
           <a:p>
             <a:r>
-              <a:t>1) Pré-processamento (30s): justifique — lixo entra, lixo sai. A subtração espectral em blocos de</a:t>
-            </a:r>
-          </a:p>
-          <a:p>
-            <a:r>
-              <a:t>   60 s foi necessária porque gravações longas estouravam a memória.</a:t>
-            </a:r>
-          </a:p>
-          <a:p>
-            <a:r>
-              <a:t>2) ASR (40s): beam search custa mais tempo, mas reduz erro; VAD evita alucinação em silêncio;</a:t>
+              <a:t>Aponte a Figura 1 com a mão enquanto percorre os estágios — ela carrega o fluxo, e o texto</a:t>
+            </a:r>
+          </a:p>
+          <a:p>
+            <a:r>
+              <a:t>carrega os parâmetros. Não leia os dois.</a:t>
+            </a:r>
+          </a:p>
+          <a:p>
+            <a:r>
+              <a:t>1) Pré-processamento (30s): lixo entra, lixo sai. Blocos de 60 s porque gravações longas</a:t>
+            </a:r>
+          </a:p>
+          <a:p>
+            <a:r>
+              <a:t>   estouravam a memória.</a:t>
+            </a:r>
+          </a:p>
+          <a:p>
+            <a:r>
+              <a:t>2) ASR (40s): beam search custa tempo mas reduz erro; VAD evita alucinação em silêncio;</a:t>
             </a:r>
           </a:p>
           <a:p>
@@ -738,17 +748,47 @@
           </a:p>
           <a:p>
             <a:r>
-              <a:t>3) Embeddings (35s): explique a janela deslizante — a sobreposição evita cortar uma ideia ao meio.</a:t>
-            </a:r>
-          </a:p>
-          <a:p>
-            <a:r>
-              <a:t>4) Agrupamento (35s): cosseno com limiar 0,78; é guloso, decisão consciente (volta nas limitações).</a:t>
-            </a:r>
-          </a:p>
-          <a:p>
-            <a:r>
-              <a:t>5) Sumarização (30s): o resumo não é livre, é guiado por três perguntas fixas.</a:t>
+              <a:t>3) Embeddings (35s): a sobreposição evita cortar uma ideia ao meio.</a:t>
+            </a:r>
+          </a:p>
+          <a:p>
+            <a:r>
+              <a:t>4) Agrupamento (35s): cosseno com limiar 0,78; guloso, decisão consciente (volta nas limitações).</a:t>
+            </a:r>
+          </a:p>
+          <a:p>
+            <a:r>
+              <a:t>5) Sumarização (30s): o resumo não é livre, é guiado por três perguntas fixas. O sumarizador é</a:t>
+            </a:r>
+          </a:p>
+          <a:p>
+            <a:r>
+              <a:t>   CONFIGURÁVEL: T5 local, ou API externa — e essa escolha troca privacidade por qualidade.</a:t>
+            </a:r>
+          </a:p>
+          <a:p>
+            <a:r>
+              <a:t>&gt;&gt;&gt; RESSALVA sobre a Figura 1: a caixa "Armazenar no Vetor DB" representa o desenho da arquitetura,</a:t>
+            </a:r>
+          </a:p>
+          <a:p>
+            <a:r>
+              <a:t>    não a implementação atual. No código os blocos e embeddings ficam em memória e os segmentos são</a:t>
+            </a:r>
+          </a:p>
+          <a:p>
+            <a:r>
+              <a:t>    persistidos em JSON em disco — não há banco vetorial. Se perguntarem qual banco vetorial você usa,</a:t>
+            </a:r>
+          </a:p>
+          <a:p>
+            <a:r>
+              <a:t>    responda: "nenhum ainda; o agrupamento é feito em NumPy sobre os vetores em memória, e o índice</a:t>
+            </a:r>
+          </a:p>
+          <a:p>
+            <a:r>
+              <a:t>    vetorial é o caminho previsto para escalar a busca."</a:t>
             </a:r>
           </a:p>
           <a:p>
@@ -833,17 +873,22 @@
           </a:p>
           <a:p>
             <a:r>
-              <a:t>1) Camadas (25s): o núcleo não sabe que existe uma interface.</a:t>
-            </a:r>
-          </a:p>
-          <a:p>
-            <a:r>
-              <a:t>2) Configuração externalizada (30s): este é o argumento mais forte de rigor — uma rodada é descrita</a:t>
-            </a:r>
-          </a:p>
-          <a:p>
-            <a:r>
-              <a:t>   por variáveis de ambiente, então outro pesquisador reproduz sem tocar no código.</a:t>
+              <a:t>A Figura 2 mostra as quatro camadas; use-a para dizer que o núcleo não sabe que existe interface.</a:t>
+            </a:r>
+          </a:p>
+          <a:p>
+            <a:r>
+              <a:t>1) Camadas (25s): o núcleo é independente das formas de acionamento.</a:t>
+            </a:r>
+          </a:p>
+          <a:p>
+            <a:r>
+              <a:t>2) Configuração externalizada (30s): argumento mais forte de rigor — outro pesquisador reproduz</a:t>
+            </a:r>
+          </a:p>
+          <a:p>
+            <a:r>
+              <a:t>   a rodada sem tocar no código.</a:t>
             </a:r>
           </a:p>
           <a:p>
@@ -858,7 +903,7 @@
           </a:p>
           <a:p>
             <a:r>
-              <a:t>5) Protocolo (20s): os quatro perfis de áudio não são arbitrários — cada um estressa uma etapa.</a:t>
+              <a:t>5) Protocolo (20s): os perfis de áudio não são arbitrários — cada um estressa uma etapa.</a:t>
             </a:r>
           </a:p>
         </p:txBody>
@@ -1205,7 +1250,17 @@
           </a:p>
           <a:p>
             <a:r>
-              <a:t>2) Contribuição (25s): auditabilidade e privacidade são os dois diferenciais. Diga isso em voz alta.</a:t>
+              <a:t>2) Contribuição (25s): auditabilidade e privacidade CONFIGURÁVEL são os dois diferenciais.</a:t>
+            </a:r>
+          </a:p>
+          <a:p>
+            <a:r>
+              <a:t>   Cuidado: não diga "o áudio nunca sai da máquina" de forma absoluta — diga que o modo local</a:t>
+            </a:r>
+          </a:p>
+          <a:p>
+            <a:r>
+              <a:t>   mantém tudo na máquina e que usar API externa é uma escolha explícita de configuração.</a:t>
             </a:r>
           </a:p>
           <a:p>
@@ -7507,8 +7562,8 @@
         </p:nvSpPr>
         <p:spPr>
           <a:xfrm>
-            <a:off x="502920" y="1005840"/>
-            <a:ext cx="9555480" cy="384048"/>
+            <a:off x="502920" y="932688"/>
+            <a:ext cx="9555480" cy="365760"/>
           </a:xfrm>
           <a:prstGeom prst="rect">
             <a:avLst/>
@@ -7549,8 +7604,8 @@
         </p:nvSpPr>
         <p:spPr>
           <a:xfrm>
-            <a:off x="502920" y="1481328"/>
-            <a:ext cx="9555480" cy="4343400"/>
+            <a:off x="502920" y="1371600"/>
+            <a:ext cx="9555480" cy="2880360"/>
           </a:xfrm>
           <a:prstGeom prst="rect">
             <a:avLst/>
@@ -7562,25 +7617,6 @@
             <a:spAutoFit/>
           </a:bodyPr>
           <a:lstStyle/>
-          <a:p>
-            <a:pPr>
-              <a:spcBef>
-                <a:spcPts val="300"/>
-              </a:spcBef>
-              <a:spcAft>
-                <a:spcPts val="200"/>
-              </a:spcAft>
-            </a:pPr>
-            <a:r>
-              <a:rPr sz="1450">
-                <a:solidFill>
-                  <a:srgbClr val="111A24"/>
-                </a:solidFill>
-                <a:latin typeface="Arial"/>
-              </a:rPr>
-              <a:t>Abordagem de pesquisa aplicada e experimental: o problema é decomposto em etapas com responsabilidade única e saída bem definida para a etapa seguinte.</a:t>
-            </a:r>
-          </a:p>
           <a:p>
             <a:pPr marL="201168" indent="-201168">
               <a:spcBef>
@@ -7635,7 +7671,7 @@
                 </a:solidFill>
                 <a:latin typeface="Arial"/>
               </a:rPr>
-              <a:t>3.  Estruturação semântica (Sentence-BERT) — tokenização e reorganização em janelas deslizantes de 500 tokens com sobreposição de 50; cada janela vira um vetor normalizado em L2.</a:t>
+              <a:t>3.  Estruturação semântica (Sentence-BERT) — janelas deslizantes de 500 tokens com sobreposição de 50; cada janela vira um vetor normalizado em L2.</a:t>
             </a:r>
           </a:p>
           <a:p>
@@ -7654,7 +7690,7 @@
                 </a:solidFill>
                 <a:latin typeface="Arial"/>
               </a:rPr>
-              <a:t>4.  Agrupamento temático — similaridade de cosseno contra limiar de 0,78, com fusão incremental gulosa e atualização do centroide; cada bloco é remapeado ao eixo temporal da reunião.</a:t>
+              <a:t>4.  Agrupamento temático — similaridade de cosseno contra limiar de 0,78, com fusão incremental gulosa; cada bloco é remapeado ao eixo temporal da reunião.</a:t>
             </a:r>
           </a:p>
           <a:p>
@@ -7673,9 +7709,56 @@
                 </a:solidFill>
                 <a:latin typeface="Arial"/>
               </a:rPr>
-              <a:t>5.  Sumarização (T5) — instruções em linguagem natural por seção (decisões / pendências / próximos passos), com corte controlado de contexto, somadas a uma visão geral da transcrição.</a:t>
-            </a:r>
-          </a:p>
+              <a:t>5.  Sumarização (T5-small local, ou API externa por configuração) — três instruções fixas: decisões, pendências e próximos passos, mais uma visão geral.</a:t>
+            </a:r>
+          </a:p>
+        </p:txBody>
+      </p:sp>
+      <p:pic>
+        <p:nvPicPr>
+          <p:cNvPr id="23" name="Picture 22" descr="pipeline_horizontal.png"/>
+          <p:cNvPicPr>
+            <a:picLocks noChangeAspect="1"/>
+          </p:cNvPicPr>
+          <p:nvPr/>
+        </p:nvPicPr>
+        <p:blipFill>
+          <a:blip r:embed="rId3"/>
+          <a:stretch>
+            <a:fillRect/>
+          </a:stretch>
+        </p:blipFill>
+        <p:spPr>
+          <a:xfrm>
+            <a:off x="502920" y="4370832"/>
+            <a:ext cx="9555480" cy="1408838"/>
+          </a:xfrm>
+          <a:prstGeom prst="rect">
+            <a:avLst/>
+          </a:prstGeom>
+        </p:spPr>
+      </p:pic>
+      <p:sp>
+        <p:nvSpPr>
+          <p:cNvPr id="24" name="TextBox 23"/>
+          <p:cNvSpPr txBox="1"/>
+          <p:nvPr/>
+        </p:nvSpPr>
+        <p:spPr>
+          <a:xfrm>
+            <a:off x="502920" y="5742432"/>
+            <a:ext cx="9555480" cy="292608"/>
+          </a:xfrm>
+          <a:prstGeom prst="rect">
+            <a:avLst/>
+          </a:prstGeom>
+          <a:noFill/>
+        </p:spPr>
+        <p:txBody>
+          <a:bodyPr wrap="square">
+            <a:spAutoFit/>
+          </a:bodyPr>
+          <a:lstStyle/>
           <a:p>
             <a:pPr>
               <a:spcBef>
@@ -7692,343 +7775,7 @@
                 </a:solidFill>
                 <a:latin typeface="Arial"/>
               </a:rPr>
-              <a:t>Exportação: transcrição em TXT e PDF; resumo estruturado em PDF e JSON.</a:t>
-            </a:r>
-          </a:p>
-        </p:txBody>
-      </p:sp>
-      <p:sp>
-        <p:nvSpPr>
-          <p:cNvPr id="23" name="Chevron 22"/>
-          <p:cNvSpPr/>
-          <p:nvPr/>
-        </p:nvSpPr>
-        <p:spPr>
-          <a:xfrm>
-            <a:off x="566928" y="5138928"/>
-            <a:ext cx="1645920" cy="566928"/>
-          </a:xfrm>
-          <a:prstGeom prst="chevron">
-            <a:avLst/>
-          </a:prstGeom>
-          <a:solidFill>
-            <a:srgbClr val="111A24"/>
-          </a:solidFill>
-          <a:ln w="12700">
-            <a:solidFill>
-              <a:srgbClr val="FFFFFF"/>
-            </a:solidFill>
-          </a:ln>
-          <a:effectLst/>
-        </p:spPr>
-        <p:style>
-          <a:lnRef idx="1">
-            <a:schemeClr val="accent1"/>
-          </a:lnRef>
-          <a:fillRef idx="3">
-            <a:schemeClr val="accent1"/>
-          </a:fillRef>
-          <a:effectRef idx="2">
-            <a:schemeClr val="accent1"/>
-          </a:effectRef>
-          <a:fontRef idx="minor">
-            <a:schemeClr val="lt1"/>
-          </a:fontRef>
-        </p:style>
-        <p:txBody>
-          <a:bodyPr rtlCol="0" anchor="ctr" wrap="square" lIns="36576" rIns="36576"/>
-          <a:lstStyle/>
-          <a:p>
-            <a:pPr algn="ctr"/>
-            <a:r>
-              <a:rPr sz="900" b="1">
-                <a:solidFill>
-                  <a:srgbClr val="FFFFFF"/>
-                </a:solidFill>
-                <a:latin typeface="Arial"/>
-              </a:rPr>
-              <a:t>Áudio da
-reunião</a:t>
-            </a:r>
-          </a:p>
-        </p:txBody>
-      </p:sp>
-      <p:sp>
-        <p:nvSpPr>
-          <p:cNvPr id="24" name="Chevron 23"/>
-          <p:cNvSpPr/>
-          <p:nvPr/>
-        </p:nvSpPr>
-        <p:spPr>
-          <a:xfrm>
-            <a:off x="2075688" y="5138928"/>
-            <a:ext cx="1645920" cy="566928"/>
-          </a:xfrm>
-          <a:prstGeom prst="chevron">
-            <a:avLst/>
-          </a:prstGeom>
-          <a:solidFill>
-            <a:srgbClr val="111A24"/>
-          </a:solidFill>
-          <a:ln w="12700">
-            <a:solidFill>
-              <a:srgbClr val="FFFFFF"/>
-            </a:solidFill>
-          </a:ln>
-          <a:effectLst/>
-        </p:spPr>
-        <p:style>
-          <a:lnRef idx="1">
-            <a:schemeClr val="accent1"/>
-          </a:lnRef>
-          <a:fillRef idx="3">
-            <a:schemeClr val="accent1"/>
-          </a:fillRef>
-          <a:effectRef idx="2">
-            <a:schemeClr val="accent1"/>
-          </a:effectRef>
-          <a:fontRef idx="minor">
-            <a:schemeClr val="lt1"/>
-          </a:fontRef>
-        </p:style>
-        <p:txBody>
-          <a:bodyPr rtlCol="0" anchor="ctr" wrap="square" lIns="36576" rIns="36576"/>
-          <a:lstStyle/>
-          <a:p>
-            <a:pPr algn="ctr"/>
-            <a:r>
-              <a:rPr sz="900" b="1">
-                <a:solidFill>
-                  <a:srgbClr val="FFFFFF"/>
-                </a:solidFill>
-                <a:latin typeface="Arial"/>
-              </a:rPr>
-              <a:t>Pré-
-processamento</a:t>
-            </a:r>
-          </a:p>
-        </p:txBody>
-      </p:sp>
-      <p:sp>
-        <p:nvSpPr>
-          <p:cNvPr id="25" name="Chevron 24"/>
-          <p:cNvSpPr/>
-          <p:nvPr/>
-        </p:nvSpPr>
-        <p:spPr>
-          <a:xfrm>
-            <a:off x="3584448" y="5138928"/>
-            <a:ext cx="1645920" cy="566928"/>
-          </a:xfrm>
-          <a:prstGeom prst="chevron">
-            <a:avLst/>
-          </a:prstGeom>
-          <a:solidFill>
-            <a:srgbClr val="E4184B"/>
-          </a:solidFill>
-          <a:ln w="12700">
-            <a:solidFill>
-              <a:srgbClr val="FFFFFF"/>
-            </a:solidFill>
-          </a:ln>
-          <a:effectLst/>
-        </p:spPr>
-        <p:style>
-          <a:lnRef idx="1">
-            <a:schemeClr val="accent1"/>
-          </a:lnRef>
-          <a:fillRef idx="3">
-            <a:schemeClr val="accent1"/>
-          </a:fillRef>
-          <a:effectRef idx="2">
-            <a:schemeClr val="accent1"/>
-          </a:effectRef>
-          <a:fontRef idx="minor">
-            <a:schemeClr val="lt1"/>
-          </a:fontRef>
-        </p:style>
-        <p:txBody>
-          <a:bodyPr rtlCol="0" anchor="ctr" wrap="square" lIns="36576" rIns="36576"/>
-          <a:lstStyle/>
-          <a:p>
-            <a:pPr algn="ctr"/>
-            <a:r>
-              <a:rPr sz="900" b="1">
-                <a:solidFill>
-                  <a:srgbClr val="FFFFFF"/>
-                </a:solidFill>
-                <a:latin typeface="Arial"/>
-              </a:rPr>
-              <a:t>Transcrição
-Whisper (ASR)</a:t>
-            </a:r>
-          </a:p>
-        </p:txBody>
-      </p:sp>
-      <p:sp>
-        <p:nvSpPr>
-          <p:cNvPr id="26" name="Chevron 25"/>
-          <p:cNvSpPr/>
-          <p:nvPr/>
-        </p:nvSpPr>
-        <p:spPr>
-          <a:xfrm>
-            <a:off x="5093208" y="5138928"/>
-            <a:ext cx="1645920" cy="566928"/>
-          </a:xfrm>
-          <a:prstGeom prst="chevron">
-            <a:avLst/>
-          </a:prstGeom>
-          <a:solidFill>
-            <a:srgbClr val="E4184B"/>
-          </a:solidFill>
-          <a:ln w="12700">
-            <a:solidFill>
-              <a:srgbClr val="FFFFFF"/>
-            </a:solidFill>
-          </a:ln>
-          <a:effectLst/>
-        </p:spPr>
-        <p:style>
-          <a:lnRef idx="1">
-            <a:schemeClr val="accent1"/>
-          </a:lnRef>
-          <a:fillRef idx="3">
-            <a:schemeClr val="accent1"/>
-          </a:fillRef>
-          <a:effectRef idx="2">
-            <a:schemeClr val="accent1"/>
-          </a:effectRef>
-          <a:fontRef idx="minor">
-            <a:schemeClr val="lt1"/>
-          </a:fontRef>
-        </p:style>
-        <p:txBody>
-          <a:bodyPr rtlCol="0" anchor="ctr" wrap="square" lIns="36576" rIns="36576"/>
-          <a:lstStyle/>
-          <a:p>
-            <a:pPr algn="ctr"/>
-            <a:r>
-              <a:rPr sz="900" b="1">
-                <a:solidFill>
-                  <a:srgbClr val="FFFFFF"/>
-                </a:solidFill>
-                <a:latin typeface="Arial"/>
-              </a:rPr>
-              <a:t>Embeddings
-Sentence-BERT</a:t>
-            </a:r>
-          </a:p>
-        </p:txBody>
-      </p:sp>
-      <p:sp>
-        <p:nvSpPr>
-          <p:cNvPr id="27" name="Chevron 26"/>
-          <p:cNvSpPr/>
-          <p:nvPr/>
-        </p:nvSpPr>
-        <p:spPr>
-          <a:xfrm>
-            <a:off x="6601968" y="5138928"/>
-            <a:ext cx="1645920" cy="566928"/>
-          </a:xfrm>
-          <a:prstGeom prst="chevron">
-            <a:avLst/>
-          </a:prstGeom>
-          <a:solidFill>
-            <a:srgbClr val="E4184B"/>
-          </a:solidFill>
-          <a:ln w="12700">
-            <a:solidFill>
-              <a:srgbClr val="FFFFFF"/>
-            </a:solidFill>
-          </a:ln>
-          <a:effectLst/>
-        </p:spPr>
-        <p:style>
-          <a:lnRef idx="1">
-            <a:schemeClr val="accent1"/>
-          </a:lnRef>
-          <a:fillRef idx="3">
-            <a:schemeClr val="accent1"/>
-          </a:fillRef>
-          <a:effectRef idx="2">
-            <a:schemeClr val="accent1"/>
-          </a:effectRef>
-          <a:fontRef idx="minor">
-            <a:schemeClr val="lt1"/>
-          </a:fontRef>
-        </p:style>
-        <p:txBody>
-          <a:bodyPr rtlCol="0" anchor="ctr" wrap="square" lIns="36576" rIns="36576"/>
-          <a:lstStyle/>
-          <a:p>
-            <a:pPr algn="ctr"/>
-            <a:r>
-              <a:rPr sz="900" b="1">
-                <a:solidFill>
-                  <a:srgbClr val="FFFFFF"/>
-                </a:solidFill>
-                <a:latin typeface="Arial"/>
-              </a:rPr>
-              <a:t>Agrupamento
-por cosseno</a:t>
-            </a:r>
-          </a:p>
-        </p:txBody>
-      </p:sp>
-      <p:sp>
-        <p:nvSpPr>
-          <p:cNvPr id="28" name="Chevron 27"/>
-          <p:cNvSpPr/>
-          <p:nvPr/>
-        </p:nvSpPr>
-        <p:spPr>
-          <a:xfrm>
-            <a:off x="8110728" y="5138928"/>
-            <a:ext cx="1645920" cy="566928"/>
-          </a:xfrm>
-          <a:prstGeom prst="chevron">
-            <a:avLst/>
-          </a:prstGeom>
-          <a:solidFill>
-            <a:srgbClr val="111A24"/>
-          </a:solidFill>
-          <a:ln w="12700">
-            <a:solidFill>
-              <a:srgbClr val="FFFFFF"/>
-            </a:solidFill>
-          </a:ln>
-          <a:effectLst/>
-        </p:spPr>
-        <p:style>
-          <a:lnRef idx="1">
-            <a:schemeClr val="accent1"/>
-          </a:lnRef>
-          <a:fillRef idx="3">
-            <a:schemeClr val="accent1"/>
-          </a:fillRef>
-          <a:effectRef idx="2">
-            <a:schemeClr val="accent1"/>
-          </a:effectRef>
-          <a:fontRef idx="minor">
-            <a:schemeClr val="lt1"/>
-          </a:fontRef>
-        </p:style>
-        <p:txBody>
-          <a:bodyPr rtlCol="0" anchor="ctr" wrap="square" lIns="36576" rIns="36576"/>
-          <a:lstStyle/>
-          <a:p>
-            <a:pPr algn="ctr"/>
-            <a:r>
-              <a:rPr sz="900" b="1">
-                <a:solidFill>
-                  <a:srgbClr val="FFFFFF"/>
-                </a:solidFill>
-                <a:latin typeface="Arial"/>
-              </a:rPr>
-              <a:t>Resumo T5
-+ exportação</a:t>
+              <a:t>Figura 1 — Fluxo de ponta a ponta do pipeline.</a:t>
             </a:r>
           </a:p>
         </p:txBody>
@@ -8931,7 +8678,7 @@
                 </a:solidFill>
                 <a:latin typeface="Arial"/>
               </a:rPr>
-              <a:t>▪ Uma arquitetura de referência aberta e modular que integra ASR, estruturação semântica e sumarização, executável localmente — sem enviar o áudio da reunião a terceiros.</a:t>
+              <a:t>▪ Uma arquitetura de referência aberta e modular que integra ASR, estruturação semântica e sumarização, com privacidade configurável: no modo local o áudio e o texto não saem da máquina; recorrer a uma API externa é uma decisão explícita de configuração.</a:t>
             </a:r>
           </a:p>
           <a:p>
@@ -10045,8 +9792,8 @@
         </p:nvSpPr>
         <p:spPr>
           <a:xfrm>
-            <a:off x="502920" y="1005840"/>
-            <a:ext cx="9555480" cy="384048"/>
+            <a:off x="502920" y="932688"/>
+            <a:ext cx="9555480" cy="365760"/>
           </a:xfrm>
           <a:prstGeom prst="rect">
             <a:avLst/>
@@ -10074,21 +9821,87 @@
                 </a:solidFill>
                 <a:latin typeface="Arial"/>
               </a:rPr>
-              <a:t>Decisões de projeto, reprodutibilidade e verificação</a:t>
-            </a:r>
-          </a:p>
-        </p:txBody>
-      </p:sp>
-      <p:sp>
-        <p:nvSpPr>
-          <p:cNvPr id="22" name="TextBox 21"/>
+              <a:t>Arquitetura em camadas, reprodutibilidade e verificação</a:t>
+            </a:r>
+          </a:p>
+        </p:txBody>
+      </p:sp>
+      <p:pic>
+        <p:nvPicPr>
+          <p:cNvPr id="22" name="Picture 21" descr="arquitetura_camadas.png"/>
+          <p:cNvPicPr>
+            <a:picLocks noChangeAspect="1"/>
+          </p:cNvPicPr>
+          <p:nvPr/>
+        </p:nvPicPr>
+        <p:blipFill>
+          <a:blip r:embed="rId3"/>
+          <a:stretch>
+            <a:fillRect/>
+          </a:stretch>
+        </p:blipFill>
+        <p:spPr>
+          <a:xfrm>
+            <a:off x="502920" y="1316736"/>
+            <a:ext cx="3783122" cy="4498848"/>
+          </a:xfrm>
+          <a:prstGeom prst="rect">
+            <a:avLst/>
+          </a:prstGeom>
+        </p:spPr>
+      </p:pic>
+      <p:sp>
+        <p:nvSpPr>
+          <p:cNvPr id="23" name="TextBox 22"/>
           <p:cNvSpPr txBox="1"/>
           <p:nvPr/>
         </p:nvSpPr>
         <p:spPr>
           <a:xfrm>
-            <a:off x="502920" y="1481328"/>
-            <a:ext cx="9555480" cy="4343400"/>
+            <a:off x="502920" y="5852160"/>
+            <a:ext cx="3931920" cy="274320"/>
+          </a:xfrm>
+          <a:prstGeom prst="rect">
+            <a:avLst/>
+          </a:prstGeom>
+          <a:noFill/>
+        </p:spPr>
+        <p:txBody>
+          <a:bodyPr wrap="square">
+            <a:spAutoFit/>
+          </a:bodyPr>
+          <a:lstStyle/>
+          <a:p>
+            <a:pPr>
+              <a:spcBef>
+                <a:spcPts val="800"/>
+              </a:spcBef>
+              <a:spcAft>
+                <a:spcPts val="0"/>
+              </a:spcAft>
+            </a:pPr>
+            <a:r>
+              <a:rPr sz="1250" i="1">
+                <a:solidFill>
+                  <a:srgbClr val="3C4855"/>
+                </a:solidFill>
+                <a:latin typeface="Arial"/>
+              </a:rPr>
+              <a:t>Figura 2 — As quatro camadas funcionais.</a:t>
+            </a:r>
+          </a:p>
+        </p:txBody>
+      </p:sp>
+      <p:sp>
+        <p:nvSpPr>
+          <p:cNvPr id="24" name="TextBox 23"/>
+          <p:cNvSpPr txBox="1"/>
+          <p:nvPr/>
+        </p:nvSpPr>
+        <p:spPr>
+          <a:xfrm>
+            <a:off x="4498848" y="1335024"/>
+            <a:ext cx="5559552" cy="4480560"/>
           </a:xfrm>
           <a:prstGeom prst="rect">
             <a:avLst/>
@@ -10116,26 +9929,7 @@
                 </a:solidFill>
                 <a:latin typeface="Arial"/>
               </a:rPr>
-              <a:t>▪ Arquitetura em camadas — o núcleo de IA (src/) é independente das camadas de uso (backend/): linha de comando, API FastAPI, painel Streamlit e front-end Next.js.</a:t>
-            </a:r>
-          </a:p>
-          <a:p>
-            <a:pPr marL="475488" indent="-173736">
-              <a:spcBef>
-                <a:spcPts val="200"/>
-              </a:spcBef>
-              <a:spcAft>
-                <a:spcPts val="100"/>
-              </a:spcAft>
-            </a:pPr>
-            <a:r>
-              <a:rPr sz="1350">
-                <a:solidFill>
-                  <a:srgbClr val="3C4855"/>
-                </a:solidFill>
-                <a:latin typeface="Arial"/>
-              </a:rPr>
-              <a:t>– Consequência metodológica: o núcleo pode ser testado e reutilizado sem subir interface.</a:t>
+              <a:t>▪ Arquitetura em camadas — o núcleo de IA (src/) é independente das camadas de uso (linha de comando, API FastAPI, painel Streamlit, front-end Next.js) e pode ser testado sem subir interface.</a:t>
             </a:r>
           </a:p>
           <a:p>
@@ -10154,26 +9948,7 @@
                 </a:solidFill>
                 <a:latin typeface="Arial"/>
               </a:rPr>
-              <a:t>▪ Configuração externalizada — modelo de ASR, modelo de embeddings, sumarizador, tamanho de janela, sobreposição, limiar de similaridade e limites de upload são variáveis de ambiente.</a:t>
-            </a:r>
-          </a:p>
-          <a:p>
-            <a:pPr marL="475488" indent="-173736">
-              <a:spcBef>
-                <a:spcPts val="200"/>
-              </a:spcBef>
-              <a:spcAft>
-                <a:spcPts val="100"/>
-              </a:spcAft>
-            </a:pPr>
-            <a:r>
-              <a:rPr sz="1350">
-                <a:solidFill>
-                  <a:srgbClr val="3C4855"/>
-                </a:solidFill>
-                <a:latin typeface="Arial"/>
-              </a:rPr>
-              <a:t>– Consequência metodológica: um experimento é descrito por um conjunto de variáveis, não por uma alteração de código — o que torna a rodada reprodutível.</a:t>
+              <a:t>▪ Configuração externalizada — modelo de ASR, embeddings, sumarizador, tamanho de janela, sobreposição e limiar de similaridade são variáveis de ambiente: uma rodada experimental é descrita por variáveis, não por alteração de código.</a:t>
             </a:r>
           </a:p>
           <a:p>
@@ -10192,7 +9967,7 @@
                 </a:solidFill>
                 <a:latin typeface="Arial"/>
               </a:rPr>
-              <a:t>▪ Instrumentação — toda execução devolve stage_timings: tempo de pré-processamento, transcrição, análise semântica, sumarização, exportação e tempo total de parede.</a:t>
+              <a:t>▪ Instrumentação — toda execução devolve stage_timings, com o tempo de cada etapa do pipeline e o tempo total de parede.</a:t>
             </a:r>
           </a:p>
           <a:p>
@@ -10211,7 +9986,7 @@
                 </a:solidFill>
                 <a:latin typeface="Arial"/>
               </a:rPr>
-              <a:t>▪ Verificação — suíte automatizada em pytest com dublês de modelos: 15 testes em 6 módulos cobrindo transcrição, embeddings, sumarização, validação de upload, API e integração.</a:t>
+              <a:t>▪ Verificação — suíte automatizada em pytest com dublês de modelos: 15 testes em 6 módulos, cobrindo transcrição, embeddings, sumarização, upload, API e integração.</a:t>
             </a:r>
           </a:p>
           <a:p>
@@ -10230,26 +10005,7 @@
                 </a:solidFill>
                 <a:latin typeface="Arial"/>
               </a:rPr>
-              <a:t>▪ Protocolo experimental — 2 a 4 cenários de áudio com perfis distintos: curto e limpo; médio com múltiplos falantes; com ruído de fundo; com silêncio inicial prolongado.</a:t>
-            </a:r>
-          </a:p>
-          <a:p>
-            <a:pPr marL="475488" indent="-173736">
-              <a:spcBef>
-                <a:spcPts val="200"/>
-              </a:spcBef>
-              <a:spcAft>
-                <a:spcPts val="100"/>
-              </a:spcAft>
-            </a:pPr>
-            <a:r>
-              <a:rPr sz="1350">
-                <a:solidFill>
-                  <a:srgbClr val="3C4855"/>
-                </a:solidFill>
-                <a:latin typeface="Arial"/>
-              </a:rPr>
-              <a:t>– Para cada cenário registram-se configuração, métricas automáticas e checklist qualitativo.</a:t>
+              <a:t>▪ Protocolo experimental — 2 a 4 cenários de áudio com perfis distintos; cada perfil estressa uma etapa diferente do pipeline.</a:t>
             </a:r>
           </a:p>
         </p:txBody>
